--- a/presentation/MSA_Project_Presentation.pptx
+++ b/presentation/MSA_Project_Presentation.pptx
@@ -211,7 +211,7 @@
           <a:p>
             <a:fld id="{F8687352-2B4E-480C-BCD0-55058CFCC3DE}" type="datetimeFigureOut">
               <a:rPr lang="zh-CN" altLang="en-US" smtClean="0"/>
-              <a:t>2026/4/23</a:t>
+              <a:t>2026/4/24</a:t>
             </a:fld>
             <a:endParaRPr lang="zh-CN" altLang="en-US"/>
           </a:p>
@@ -581,7 +581,7 @@
           </a:prstGeom>
           <a:extLst>
             <a:ext uri="{C572A759-6A51-4108-AA02-DFA0A04FC94B}">
-              <ma14:wrappingTextBoxFlag xmlns="" xmlns:ma14="http://schemas.microsoft.com/office/mac/drawingml/2011/main" val="0"/>
+              <ma14:wrappingTextBoxFlag xmlns:ma14="http://schemas.microsoft.com/office/mac/drawingml/2011/main" xmlns="" val="0"/>
             </a:ext>
           </a:extLst>
         </p:spPr>
@@ -755,7 +755,7 @@
           </a:prstGeom>
           <a:extLst>
             <a:ext uri="{C572A759-6A51-4108-AA02-DFA0A04FC94B}">
-              <ma14:wrappingTextBoxFlag xmlns="" xmlns:ma14="http://schemas.microsoft.com/office/mac/drawingml/2011/main" val="0"/>
+              <ma14:wrappingTextBoxFlag xmlns:ma14="http://schemas.microsoft.com/office/mac/drawingml/2011/main" xmlns="" val="0"/>
             </a:ext>
           </a:extLst>
         </p:spPr>
@@ -874,7 +874,7 @@
           </a:prstGeom>
           <a:extLst>
             <a:ext uri="{C572A759-6A51-4108-AA02-DFA0A04FC94B}">
-              <ma14:wrappingTextBoxFlag xmlns="" xmlns:ma14="http://schemas.microsoft.com/office/mac/drawingml/2011/main" val="0"/>
+              <ma14:wrappingTextBoxFlag xmlns:ma14="http://schemas.microsoft.com/office/mac/drawingml/2011/main" xmlns="" val="0"/>
             </a:ext>
           </a:extLst>
         </p:spPr>
@@ -1566,7 +1566,23 @@
             </a:pPr>
             <a:r>
               <a:rPr dirty="0"/>
-              <a:t>Mixed idealization: 1145 truss elements + 80 frame elements.</a:t>
+              <a:t>Mixed idealization: 1</a:t>
+            </a:r>
+            <a:r>
+              <a:rPr lang="en-US" dirty="0"/>
+              <a:t>00</a:t>
+            </a:r>
+            <a:r>
+              <a:rPr dirty="0"/>
+              <a:t>5 truss elements + </a:t>
+            </a:r>
+            <a:r>
+              <a:rPr lang="en-US" dirty="0"/>
+              <a:t>220</a:t>
+            </a:r>
+            <a:r>
+              <a:rPr dirty="0"/>
+              <a:t> frame elements.</a:t>
             </a:r>
           </a:p>
         </p:txBody>
@@ -3583,7 +3599,7 @@
           <p:nvPr>
             <p:extLst>
               <p:ext uri="{D42A27DB-BD31-4B8C-83A1-F6EECF244321}">
-                <p14:modId xmlns:p14="http://schemas.microsoft.com/office/powerpoint/2010/main" val="3569568591"/>
+                <p14:modId xmlns:p14="http://schemas.microsoft.com/office/powerpoint/2010/main" val="1819997773"/>
               </p:ext>
             </p:extLst>
           </p:nvPr>
@@ -3805,7 +3821,31 @@
             </a:pPr>
             <a:r>
               <a:rPr sz="2000" dirty="0"/>
-              <a:t>The validation cases support the correctness of equilibrium, compatibility, thermal strain, member-load </a:t>
+              <a:t>The validation cases support the correctness of equilibrium, compatibility, thermal strain,</a:t>
+            </a:r>
+            <a:r>
+              <a:rPr lang="en-US" sz="2000" dirty="0"/>
+              <a:t> temperature</a:t>
+            </a:r>
+            <a:r>
+              <a:rPr sz="2000" dirty="0"/>
+              <a:t> </a:t>
+            </a:r>
+            <a:r>
+              <a:rPr lang="en-US" sz="2000" dirty="0"/>
+              <a:t>load, </a:t>
+            </a:r>
+            <a:r>
+              <a:rPr sz="2000" dirty="0"/>
+              <a:t>member</a:t>
+            </a:r>
+            <a:r>
+              <a:rPr lang="en-US" sz="2000" dirty="0"/>
+              <a:t> </a:t>
+            </a:r>
+            <a:r>
+              <a:rPr sz="2000" dirty="0"/>
+              <a:t>load </a:t>
             </a:r>
             <a:r>
               <a:rPr lang="en-US" sz="2000" dirty="0"/>
@@ -4144,7 +4184,7 @@
             </a:pPr>
             <a:r>
               <a:rPr lang="en-US" altLang="zh-CN" sz="2000" dirty="0"/>
-              <a:t>One consistent pipeline is followed: read input → element routines → assembly → partition → solve → postprocess.</a:t>
+              <a:t>One consistent pipeline is followed: read input → element calculations → assembly → partition → solve → postprocess.</a:t>
             </a:r>
           </a:p>
           <a:p>
@@ -4389,8 +4429,23 @@
                 </a:solidFill>
                 <a:latin typeface="Aptos"/>
               </a:rPr>
-              <a:t>Element Quantities</a:t>
-            </a:r>
+              <a:t>Element </a:t>
+            </a:r>
+            <a:r>
+              <a:rPr lang="en-US" sz="2000" b="1" dirty="0">
+                <a:solidFill>
+                  <a:srgbClr val="1A365D"/>
+                </a:solidFill>
+                <a:latin typeface="Aptos"/>
+              </a:rPr>
+              <a:t>Calculations</a:t>
+            </a:r>
+            <a:endParaRPr sz="2000" b="1" dirty="0">
+              <a:solidFill>
+                <a:srgbClr val="1A365D"/>
+              </a:solidFill>
+              <a:latin typeface="Aptos"/>
+            </a:endParaRPr>
           </a:p>
         </p:txBody>
       </p:sp>
@@ -4829,14 +4884,20 @@
           <a:p>
             <a:pPr algn="ctr"/>
             <a:r>
-              <a:rPr sz="2000" b="1">
+              <a:rPr lang="en-US" sz="2000" b="1" dirty="0">
                 <a:solidFill>
                   <a:srgbClr val="1A365D"/>
                 </a:solidFill>
                 <a:latin typeface="Aptos"/>
               </a:rPr>
-              <a:t>Postprocess</a:t>
-            </a:r>
+              <a:t>Postprocess &amp; Output</a:t>
+            </a:r>
+            <a:endParaRPr sz="2000" b="1" dirty="0">
+              <a:solidFill>
+                <a:srgbClr val="1A365D"/>
+              </a:solidFill>
+              <a:latin typeface="Aptos"/>
+            </a:endParaRPr>
           </a:p>
         </p:txBody>
       </p:sp>
@@ -4925,7 +4986,7 @@
         <p:spPr>
           <a:xfrm>
             <a:off x="685800" y="1450109"/>
-            <a:ext cx="10972800" cy="548640"/>
+            <a:ext cx="10972800" cy="421462"/>
           </a:xfrm>
           <a:prstGeom prst="rect">
             <a:avLst/>
@@ -4953,9 +5014,18 @@
               </a:defRPr>
             </a:pPr>
             <a:r>
-              <a:rPr dirty="0"/>
-              <a:t>The code is checked feature by feature before it is used for the final bridge model.</a:t>
-            </a:r>
+              <a:rPr lang="en-US" dirty="0"/>
+              <a:t>By running </a:t>
+            </a:r>
+            <a:r>
+              <a:rPr lang="en-US" b="1" dirty="0" err="1"/>
+              <a:t>main.ipynb</a:t>
+            </a:r>
+            <a:r>
+              <a:rPr lang="en-US" dirty="0"/>
+              <a:t> sequentially, the analysis can be reproduced. </a:t>
+            </a:r>
+            <a:endParaRPr dirty="0"/>
           </a:p>
         </p:txBody>
       </p:sp>
@@ -5556,7 +5626,7 @@
                 </a:solidFill>
                 <a:latin typeface="Aptos"/>
               </a:rPr>
-              <a:t>Why Validation?</a:t>
+              <a:t>How to reproduce</a:t>
             </a:r>
           </a:p>
         </p:txBody>
